--- a/Automation/AI-In-Automation/s2_handson-raw_notes_into_structured_report_etc.pptx
+++ b/Automation/AI-In-Automation/s2_handson-raw_notes_into_structured_report_etc.pptx
@@ -224,7 +224,7 @@
           <a:p>
             <a:fld id="{7BAEECA8-D063-486F-AE31-5020270C1449}" type="datetimeFigureOut">
               <a:rPr lang="en-US" smtClean="0"/>
-              <a:t>4/20/2026</a:t>
+              <a:t>10/13/2026</a:t>
             </a:fld>
             <a:endParaRPr lang="en-US"/>
           </a:p>
@@ -401,7 +401,7 @@
           <a:p>
             <a:fld id="{CB233BD1-3BA8-448D-9D08-7846095EA517}" type="datetimeFigureOut">
               <a:rPr lang="en-US" smtClean="0"/>
-              <a:t>4/20/2026</a:t>
+              <a:t>10/13/2026</a:t>
             </a:fld>
             <a:endParaRPr lang="en-US"/>
           </a:p>
@@ -815,7 +815,7 @@
           <a:p>
             <a:fld id="{6383FAE1-13DE-4511-8C1B-C8AFB720664C}" type="datetimeFigureOut">
               <a:rPr lang="en-US" smtClean="0"/>
-              <a:t>4/20/2026</a:t>
+              <a:t>10/13/2026</a:t>
             </a:fld>
             <a:endParaRPr lang="en-US"/>
           </a:p>
@@ -1013,7 +1013,7 @@
           <a:p>
             <a:fld id="{6383FAE1-13DE-4511-8C1B-C8AFB720664C}" type="datetimeFigureOut">
               <a:rPr lang="en-US" smtClean="0"/>
-              <a:t>4/20/2026</a:t>
+              <a:t>10/13/2026</a:t>
             </a:fld>
             <a:endParaRPr lang="en-US"/>
           </a:p>
@@ -1221,7 +1221,7 @@
           <a:p>
             <a:fld id="{6383FAE1-13DE-4511-8C1B-C8AFB720664C}" type="datetimeFigureOut">
               <a:rPr lang="en-US" smtClean="0"/>
-              <a:t>4/20/2026</a:t>
+              <a:t>10/13/2026</a:t>
             </a:fld>
             <a:endParaRPr lang="en-US"/>
           </a:p>
@@ -1419,7 +1419,7 @@
           <a:p>
             <a:fld id="{6383FAE1-13DE-4511-8C1B-C8AFB720664C}" type="datetimeFigureOut">
               <a:rPr lang="en-US" smtClean="0"/>
-              <a:t>4/20/2026</a:t>
+              <a:t>10/13/2026</a:t>
             </a:fld>
             <a:endParaRPr lang="en-US"/>
           </a:p>
@@ -1694,7 +1694,7 @@
           <a:p>
             <a:fld id="{6383FAE1-13DE-4511-8C1B-C8AFB720664C}" type="datetimeFigureOut">
               <a:rPr lang="en-US" smtClean="0"/>
-              <a:t>4/20/2026</a:t>
+              <a:t>10/13/2026</a:t>
             </a:fld>
             <a:endParaRPr lang="en-US"/>
           </a:p>
@@ -1959,7 +1959,7 @@
           <a:p>
             <a:fld id="{6383FAE1-13DE-4511-8C1B-C8AFB720664C}" type="datetimeFigureOut">
               <a:rPr lang="en-US" smtClean="0"/>
-              <a:t>4/20/2026</a:t>
+              <a:t>10/13/2026</a:t>
             </a:fld>
             <a:endParaRPr lang="en-US"/>
           </a:p>
@@ -2371,7 +2371,7 @@
           <a:p>
             <a:fld id="{6383FAE1-13DE-4511-8C1B-C8AFB720664C}" type="datetimeFigureOut">
               <a:rPr lang="en-US" smtClean="0"/>
-              <a:t>4/20/2026</a:t>
+              <a:t>10/13/2026</a:t>
             </a:fld>
             <a:endParaRPr lang="en-US"/>
           </a:p>
@@ -2512,7 +2512,7 @@
           <a:p>
             <a:fld id="{6383FAE1-13DE-4511-8C1B-C8AFB720664C}" type="datetimeFigureOut">
               <a:rPr lang="en-US" smtClean="0"/>
-              <a:t>4/20/2026</a:t>
+              <a:t>10/13/2026</a:t>
             </a:fld>
             <a:endParaRPr lang="en-US"/>
           </a:p>
@@ -2625,7 +2625,7 @@
           <a:p>
             <a:fld id="{6383FAE1-13DE-4511-8C1B-C8AFB720664C}" type="datetimeFigureOut">
               <a:rPr lang="en-US" smtClean="0"/>
-              <a:t>4/20/2026</a:t>
+              <a:t>10/13/2026</a:t>
             </a:fld>
             <a:endParaRPr lang="en-US"/>
           </a:p>
@@ -2936,7 +2936,7 @@
           <a:p>
             <a:fld id="{6383FAE1-13DE-4511-8C1B-C8AFB720664C}" type="datetimeFigureOut">
               <a:rPr lang="en-US" smtClean="0"/>
-              <a:t>4/20/2026</a:t>
+              <a:t>10/13/2026</a:t>
             </a:fld>
             <a:endParaRPr lang="en-US"/>
           </a:p>
@@ -3227,7 +3227,7 @@
           <a:p>
             <a:fld id="{6383FAE1-13DE-4511-8C1B-C8AFB720664C}" type="datetimeFigureOut">
               <a:rPr lang="en-US" smtClean="0"/>
-              <a:t>4/20/2026</a:t>
+              <a:t>10/13/2026</a:t>
             </a:fld>
             <a:endParaRPr lang="en-US"/>
           </a:p>
@@ -3471,7 +3471,7 @@
           <a:p>
             <a:fld id="{6383FAE1-13DE-4511-8C1B-C8AFB720664C}" type="datetimeFigureOut">
               <a:rPr lang="en-US" smtClean="0"/>
-              <a:t>4/20/2026</a:t>
+              <a:t>10/13/2026</a:t>
             </a:fld>
             <a:endParaRPr lang="en-US"/>
           </a:p>
@@ -4066,168 +4066,6 @@
           <a:chExt cx="0" cy="0"/>
         </a:xfrm>
       </p:grpSpPr>
-      <p:sp>
-        <p:nvSpPr>
-          <p:cNvPr id="2" name="Title 1">
-            <a:extLst>
-              <a:ext uri="{FF2B5EF4-FFF2-40B4-BE49-F238E27FC236}">
-                <a16:creationId xmlns:a16="http://schemas.microsoft.com/office/drawing/2014/main" id="{795E1B75-886E-0812-B2FD-DD250C225521}"/>
-              </a:ext>
-            </a:extLst>
-          </p:cNvPr>
-          <p:cNvSpPr>
-            <a:spLocks noGrp="1"/>
-          </p:cNvSpPr>
-          <p:nvPr>
-            <p:ph type="title"/>
-          </p:nvPr>
-        </p:nvSpPr>
-        <p:spPr>
-          <a:xfrm>
-            <a:off x="274320" y="136525"/>
-            <a:ext cx="11466576" cy="832739"/>
-          </a:xfrm>
-        </p:spPr>
-        <p:txBody>
-          <a:bodyPr>
-            <a:normAutofit/>
-          </a:bodyPr>
-          <a:lstStyle/>
-          <a:p>
-            <a:r>
-              <a:rPr lang="en-US" sz="3600" dirty="0"/>
-              <a:t>EXTRA</a:t>
-            </a:r>
-          </a:p>
-        </p:txBody>
-      </p:sp>
-      <p:sp>
-        <p:nvSpPr>
-          <p:cNvPr id="4" name="TextBox 3">
-            <a:extLst>
-              <a:ext uri="{FF2B5EF4-FFF2-40B4-BE49-F238E27FC236}">
-                <a16:creationId xmlns:a16="http://schemas.microsoft.com/office/drawing/2014/main" id="{902F8BE4-9CEA-0DAD-0357-E0A8215F169D}"/>
-              </a:ext>
-            </a:extLst>
-          </p:cNvPr>
-          <p:cNvSpPr txBox="1"/>
-          <p:nvPr/>
-        </p:nvSpPr>
-        <p:spPr>
-          <a:xfrm>
-            <a:off x="274320" y="933117"/>
-            <a:ext cx="11658600" cy="1477328"/>
-          </a:xfrm>
-          <a:prstGeom prst="rect">
-            <a:avLst/>
-          </a:prstGeom>
-          <a:noFill/>
-        </p:spPr>
-        <p:txBody>
-          <a:bodyPr wrap="square">
-            <a:spAutoFit/>
-          </a:bodyPr>
-          <a:lstStyle/>
-          <a:p>
-            <a:pPr marL="0" indent="0">
-              <a:buNone/>
-            </a:pPr>
-            <a:r>
-              <a:rPr lang="en-US" dirty="0" err="1">
-                <a:solidFill>
-                  <a:schemeClr val="accent6">
-                    <a:lumMod val="60000"/>
-                    <a:lumOff val="40000"/>
-                  </a:schemeClr>
-                </a:solidFill>
-              </a:rPr>
-              <a:t>Ffnbksdfd</a:t>
-            </a:r>
-            <a:endParaRPr lang="en-US" dirty="0">
-              <a:solidFill>
-                <a:schemeClr val="accent6">
-                  <a:lumMod val="60000"/>
-                  <a:lumOff val="40000"/>
-                </a:schemeClr>
-              </a:solidFill>
-            </a:endParaRPr>
-          </a:p>
-          <a:p>
-            <a:pPr marL="0" indent="0">
-              <a:buNone/>
-            </a:pPr>
-            <a:r>
-              <a:rPr lang="en-US" dirty="0" err="1">
-                <a:solidFill>
-                  <a:schemeClr val="accent6">
-                    <a:lumMod val="60000"/>
-                    <a:lumOff val="40000"/>
-                  </a:schemeClr>
-                </a:solidFill>
-              </a:rPr>
-              <a:t>Fdslj;f</a:t>
-            </a:r>
-            <a:endParaRPr lang="en-US" dirty="0">
-              <a:solidFill>
-                <a:schemeClr val="accent6">
-                  <a:lumMod val="60000"/>
-                  <a:lumOff val="40000"/>
-                </a:schemeClr>
-              </a:solidFill>
-            </a:endParaRPr>
-          </a:p>
-          <a:p>
-            <a:pPr marL="0" indent="0">
-              <a:buNone/>
-            </a:pPr>
-            <a:endParaRPr lang="en-US" dirty="0">
-              <a:solidFill>
-                <a:schemeClr val="accent6">
-                  <a:lumMod val="60000"/>
-                  <a:lumOff val="40000"/>
-                </a:schemeClr>
-              </a:solidFill>
-            </a:endParaRPr>
-          </a:p>
-          <a:p>
-            <a:pPr marL="0" indent="0">
-              <a:buNone/>
-            </a:pPr>
-            <a:r>
-              <a:rPr lang="en-US" dirty="0" err="1">
-                <a:solidFill>
-                  <a:schemeClr val="accent6">
-                    <a:lumMod val="60000"/>
-                    <a:lumOff val="40000"/>
-                  </a:schemeClr>
-                </a:solidFill>
-              </a:rPr>
-              <a:t>Fl;ds</a:t>
-            </a:r>
-            <a:endParaRPr lang="en-US" dirty="0">
-              <a:solidFill>
-                <a:schemeClr val="accent6">
-                  <a:lumMod val="60000"/>
-                  <a:lumOff val="40000"/>
-                </a:schemeClr>
-              </a:solidFill>
-            </a:endParaRPr>
-          </a:p>
-          <a:p>
-            <a:pPr marL="0" indent="0">
-              <a:buNone/>
-            </a:pPr>
-            <a:endParaRPr lang="en-US" dirty="0">
-              <a:solidFill>
-                <a:schemeClr val="accent6">
-                  <a:lumMod val="60000"/>
-                  <a:lumOff val="40000"/>
-                </a:schemeClr>
-              </a:solidFill>
-            </a:endParaRPr>
-          </a:p>
-        </p:txBody>
-      </p:sp>
     </p:spTree>
     <p:extLst>
       <p:ext uri="{BB962C8B-B14F-4D97-AF65-F5344CB8AC3E}">
